--- a/syllabus/24_intégration_SQL/syllabus_24_sql.pptx
+++ b/syllabus/24_intégration_SQL/syllabus_24_sql.pptx
@@ -9,7 +9,7 @@
   </p:notesMasterIdLst>
   <p:sldIdLst>
     <p:sldId id="416" r:id="rId2"/>
-    <p:sldId id="417" r:id="rId3"/>
+    <p:sldId id="408" r:id="rId3"/>
     <p:sldId id="542" r:id="rId4"/>
     <p:sldId id="625" r:id="rId5"/>
     <p:sldId id="632" r:id="rId6"/>
@@ -177,7 +177,7 @@
         <p14:section name="11. SQL database" id="{0CC3B223-8800-4AEE-84C7-95C5856A7169}">
           <p14:sldIdLst>
             <p14:sldId id="416"/>
-            <p14:sldId id="417"/>
+            <p14:sldId id="408"/>
             <p14:sldId id="542"/>
             <p14:sldId id="625"/>
             <p14:sldId id="632"/>
@@ -366,7 +366,7 @@
           <a:p>
             <a:fld id="{FCE9742F-4DAE-47F5-9244-6ACC3985DD6B}" type="datetimeFigureOut">
               <a:rPr lang="fr-BE" smtClean="0"/>
-              <a:t>19-01-26</a:t>
+              <a:t>07-09-26</a:t>
             </a:fld>
             <a:endParaRPr lang="fr-BE"/>
           </a:p>
@@ -1424,7 +1424,7 @@
           <a:p>
             <a:fld id="{F3953782-D06E-4853-BE3C-64C197273937}" type="datetimeFigureOut">
               <a:rPr lang="fr-BE" smtClean="0"/>
-              <a:t>19-01-26</a:t>
+              <a:t>07-09-26</a:t>
             </a:fld>
             <a:endParaRPr lang="fr-BE"/>
           </a:p>
@@ -2821,6 +2821,22 @@
       </p:transition>
     </mc:Fallback>
   </mc:AlternateContent>
+  <p:extLst>
+    <p:ext uri="{DCECCB84-F9BA-43D5-87BE-67443E8EF086}">
+      <p15:sldGuideLst xmlns:p15="http://schemas.microsoft.com/office/powerpoint/2012/main">
+        <p15:guide id="1" orient="horz" pos="2160" userDrawn="1">
+          <p15:clr>
+            <a:srgbClr val="FBAE40"/>
+          </p15:clr>
+        </p15:guide>
+        <p15:guide id="2" pos="3840" userDrawn="1">
+          <p15:clr>
+            <a:srgbClr val="FBAE40"/>
+          </p15:clr>
+        </p15:guide>
+      </p15:sldGuideLst>
+    </p:ext>
+  </p:extLst>
 </p:sldLayout>
 </file>
 
@@ -3283,7 +3299,7 @@
           <a:p>
             <a:fld id="{F3953782-D06E-4853-BE3C-64C197273937}" type="datetimeFigureOut">
               <a:rPr lang="fr-BE" smtClean="0"/>
-              <a:t>19-01-26</a:t>
+              <a:t>07-09-26</a:t>
             </a:fld>
             <a:endParaRPr lang="fr-BE"/>
           </a:p>
@@ -3599,7 +3615,7 @@
           <a:p>
             <a:fld id="{F3953782-D06E-4853-BE3C-64C197273937}" type="datetimeFigureOut">
               <a:rPr lang="fr-BE" smtClean="0"/>
-              <a:t>19-01-26</a:t>
+              <a:t>07-09-26</a:t>
             </a:fld>
             <a:endParaRPr lang="fr-BE"/>
           </a:p>
@@ -3796,7 +3812,7 @@
           <a:p>
             <a:fld id="{F3953782-D06E-4853-BE3C-64C197273937}" type="datetimeFigureOut">
               <a:rPr lang="fr-BE" smtClean="0"/>
-              <a:t>19-01-26</a:t>
+              <a:t>07-09-26</a:t>
             </a:fld>
             <a:endParaRPr lang="fr-BE"/>
           </a:p>
@@ -4058,7 +4074,7 @@
           <a:p>
             <a:fld id="{F3953782-D06E-4853-BE3C-64C197273937}" type="datetimeFigureOut">
               <a:rPr lang="fr-BE" smtClean="0"/>
-              <a:t>19-01-26</a:t>
+              <a:t>07-09-26</a:t>
             </a:fld>
             <a:endParaRPr lang="fr-BE"/>
           </a:p>
@@ -4456,7 +4472,7 @@
           <a:p>
             <a:fld id="{F3953782-D06E-4853-BE3C-64C197273937}" type="datetimeFigureOut">
               <a:rPr lang="fr-BE" smtClean="0"/>
-              <a:t>19-01-26</a:t>
+              <a:t>07-09-26</a:t>
             </a:fld>
             <a:endParaRPr lang="fr-BE"/>
           </a:p>
@@ -4604,7 +4620,7 @@
           <a:p>
             <a:fld id="{F3953782-D06E-4853-BE3C-64C197273937}" type="datetimeFigureOut">
               <a:rPr lang="fr-BE" smtClean="0"/>
-              <a:t>19-01-26</a:t>
+              <a:t>07-09-26</a:t>
             </a:fld>
             <a:endParaRPr lang="fr-BE"/>
           </a:p>
@@ -4953,7 +4969,7 @@
           <a:p>
             <a:fld id="{F3953782-D06E-4853-BE3C-64C197273937}" type="datetimeFigureOut">
               <a:rPr lang="fr-BE" smtClean="0"/>
-              <a:t>19-01-26</a:t>
+              <a:t>07-09-26</a:t>
             </a:fld>
             <a:endParaRPr lang="fr-BE"/>
           </a:p>
@@ -5161,36 +5177,6 @@
           </a:p>
         </p:txBody>
       </p:sp>
-      <p:pic>
-        <p:nvPicPr>
-          <p:cNvPr id="8" name="Picture 7"/>
-          <p:cNvPicPr>
-            <a:picLocks noChangeAspect="1"/>
-          </p:cNvPicPr>
-          <p:nvPr/>
-        </p:nvPicPr>
-        <p:blipFill>
-          <a:blip r:embed="rId14">
-            <a:extLst>
-              <a:ext uri="{28A0092B-C50C-407E-A947-70E740481C1C}">
-                <a14:useLocalDpi xmlns:a14="http://schemas.microsoft.com/office/drawing/2010/main" val="0"/>
-              </a:ext>
-            </a:extLst>
-          </a:blip>
-          <a:stretch>
-            <a:fillRect/>
-          </a:stretch>
-        </p:blipFill>
-        <p:spPr>
-          <a:xfrm>
-            <a:off x="10830515" y="5719725"/>
-            <a:ext cx="1046571" cy="914479"/>
-          </a:xfrm>
-          <a:prstGeom prst="rect">
-            <a:avLst/>
-          </a:prstGeom>
-        </p:spPr>
-      </p:pic>
       <p:sp>
         <p:nvSpPr>
           <p:cNvPr id="4" name="Espace réservé du numéro de diapositive 3">
@@ -5279,7 +5265,7 @@
           <a:p>
             <a:fld id="{F3953782-D06E-4853-BE3C-64C197273937}" type="datetimeFigureOut">
               <a:rPr lang="fr-BE" smtClean="0"/>
-              <a:t>19-01-26</a:t>
+              <a:t>07-09-26</a:t>
             </a:fld>
             <a:endParaRPr lang="fr-BE"/>
           </a:p>
@@ -5328,42 +5314,6 @@
           </a:p>
         </p:txBody>
       </p:sp>
-      <p:pic>
-        <p:nvPicPr>
-          <p:cNvPr id="7" name="Picture 7">
-            <a:extLst>
-              <a:ext uri="{FF2B5EF4-FFF2-40B4-BE49-F238E27FC236}">
-                <a16:creationId xmlns:a16="http://schemas.microsoft.com/office/drawing/2014/main" id="{58639761-DDB1-5C37-F208-6B37923043C4}"/>
-              </a:ext>
-            </a:extLst>
-          </p:cNvPr>
-          <p:cNvPicPr>
-            <a:picLocks noChangeAspect="1"/>
-          </p:cNvPicPr>
-          <p:nvPr userDrawn="1"/>
-        </p:nvPicPr>
-        <p:blipFill>
-          <a:blip r:embed="rId14">
-            <a:extLst>
-              <a:ext uri="{28A0092B-C50C-407E-A947-70E740481C1C}">
-                <a14:useLocalDpi xmlns:a14="http://schemas.microsoft.com/office/drawing/2010/main" val="0"/>
-              </a:ext>
-            </a:extLst>
-          </a:blip>
-          <a:stretch>
-            <a:fillRect/>
-          </a:stretch>
-        </p:blipFill>
-        <p:spPr>
-          <a:xfrm>
-            <a:off x="10830515" y="5719725"/>
-            <a:ext cx="1046571" cy="914479"/>
-          </a:xfrm>
-          <a:prstGeom prst="rect">
-            <a:avLst/>
-          </a:prstGeom>
-        </p:spPr>
-      </p:pic>
     </p:spTree>
     <p:extLst>
       <p:ext uri="{BB962C8B-B14F-4D97-AF65-F5344CB8AC3E}">
@@ -5760,6 +5710,22 @@
       </a:lvl9pPr>
     </p:otherStyle>
   </p:txStyles>
+  <p:extLst>
+    <p:ext uri="{27BBF7A9-308A-43DC-89C8-2F10F3537804}">
+      <p15:sldGuideLst xmlns:p15="http://schemas.microsoft.com/office/powerpoint/2012/main">
+        <p15:guide id="1" orient="horz" pos="2160" userDrawn="1">
+          <p15:clr>
+            <a:srgbClr val="F26B43"/>
+          </p15:clr>
+        </p15:guide>
+        <p15:guide id="2" pos="3840" userDrawn="1">
+          <p15:clr>
+            <a:srgbClr val="F26B43"/>
+          </p15:clr>
+        </p15:guide>
+      </p15:sldGuideLst>
+    </p:ext>
+  </p:extLst>
 </p:sldMaster>
 </file>
 
@@ -5810,10 +5776,6 @@
             <a:br>
               <a:rPr lang="fr-BE" dirty="0"/>
             </a:br>
-            <a:r>
-              <a:rPr lang="fr-BE"/>
-              <a:t/>
-            </a:r>
             <a:br>
               <a:rPr lang="fr-BE"/>
             </a:br>
@@ -5934,19 +5896,12 @@
         <p14:reveal/>
       </p:transition>
     </mc:Choice>
-    <mc:Fallback xmlns:ahyp="http://schemas.microsoft.com/office/drawing/2018/hyperlinkcolor" xmlns:p15="http://schemas.microsoft.com/office/powerpoint/2012/main" xmlns:com="http://schemas.openxmlformats.org/drawingml/2006/compatibility" xmlns:pvml="urn:schemas-microsoft-com:office:powerpoint" xmlns:v="urn:schemas-microsoft-com:vml" xmlns:o="urn:schemas-microsoft-com:office:office" xmlns:dgm="http://schemas.openxmlformats.org/drawingml/2006/diagram" xmlns:c="http://schemas.openxmlformats.org/drawingml/2006/chart" xmlns:mv="urn:schemas-microsoft-com:mac:vml" xmlns="">
+    <mc:Fallback xmlns="" xmlns:mv="urn:schemas-microsoft-com:mac:vml" xmlns:c="http://schemas.openxmlformats.org/drawingml/2006/chart" xmlns:dgm="http://schemas.openxmlformats.org/drawingml/2006/diagram" xmlns:o="urn:schemas-microsoft-com:office:office" xmlns:v="urn:schemas-microsoft-com:vml" xmlns:pvml="urn:schemas-microsoft-com:office:powerpoint" xmlns:com="http://schemas.openxmlformats.org/drawingml/2006/compatibility" xmlns:p15="http://schemas.microsoft.com/office/powerpoint/2012/main" xmlns:ahyp="http://schemas.microsoft.com/office/drawing/2018/hyperlinkcolor">
       <p:transition spd="med">
         <p:fade/>
       </p:transition>
     </mc:Fallback>
   </mc:AlternateContent>
-  <p:timing>
-    <p:tnLst>
-      <p:par>
-        <p:cTn id="1" dur="indefinite" restart="never" nodeType="tmRoot"/>
-      </p:par>
-    </p:tnLst>
-  </p:timing>
 </p:sld>
 </file>
 
@@ -6297,13 +6252,6 @@
       </p:transition>
     </mc:Fallback>
   </mc:AlternateContent>
-  <p:timing>
-    <p:tnLst>
-      <p:par>
-        <p:cTn id="1" dur="indefinite" restart="never" nodeType="tmRoot"/>
-      </p:par>
-    </p:tnLst>
-  </p:timing>
 </p:sld>
 </file>
 
@@ -6489,13 +6437,6 @@
       </p:transition>
     </mc:Fallback>
   </mc:AlternateContent>
-  <p:timing>
-    <p:tnLst>
-      <p:par>
-        <p:cTn id="1" dur="indefinite" restart="never" nodeType="tmRoot"/>
-      </p:par>
-    </p:tnLst>
-  </p:timing>
 </p:sld>
 </file>
 
@@ -6637,13 +6578,6 @@
       </p:transition>
     </mc:Fallback>
   </mc:AlternateContent>
-  <p:timing>
-    <p:tnLst>
-      <p:par>
-        <p:cTn id="1" dur="indefinite" restart="never" nodeType="tmRoot"/>
-      </p:par>
-    </p:tnLst>
-  </p:timing>
 </p:sld>
 </file>
 
@@ -6866,13 +6800,6 @@
       </p:transition>
     </mc:Fallback>
   </mc:AlternateContent>
-  <p:timing>
-    <p:tnLst>
-      <p:par>
-        <p:cTn id="1" dur="indefinite" restart="never" nodeType="tmRoot"/>
-      </p:par>
-    </p:tnLst>
-  </p:timing>
 </p:sld>
 </file>
 
@@ -7253,13 +7180,6 @@
       </p:transition>
     </mc:Fallback>
   </mc:AlternateContent>
-  <p:timing>
-    <p:tnLst>
-      <p:par>
-        <p:cTn id="1" dur="indefinite" restart="never" nodeType="tmRoot"/>
-      </p:par>
-    </p:tnLst>
-  </p:timing>
 </p:sld>
 </file>
 
@@ -7468,18 +7388,6 @@
               <a:rPr lang="fr-BE"/>
               <a:t>et cousins</a:t>
             </a:r>
-            <a:r>
-              <a:rPr lang="fr-BE" b="1">
-                <a:solidFill>
-                  <a:schemeClr val="accent6">
-                    <a:lumMod val="50000"/>
-                  </a:schemeClr>
-                </a:solidFill>
-                <a:latin typeface="Courier New" panose="02070309020205020404" pitchFamily="49" charset="0"/>
-                <a:cs typeface="Courier New" panose="02070309020205020404" pitchFamily="49" charset="0"/>
-              </a:rPr>
-              <a:t/>
-            </a:r>
             <a:br>
               <a:rPr lang="fr-BE" b="1">
                 <a:solidFill>
@@ -7679,13 +7587,6 @@
       </p:transition>
     </mc:Fallback>
   </mc:AlternateContent>
-  <p:timing>
-    <p:tnLst>
-      <p:par>
-        <p:cTn id="1" dur="indefinite" restart="never" nodeType="tmRoot"/>
-      </p:par>
-    </p:tnLst>
-  </p:timing>
 </p:sld>
 </file>
 
@@ -7937,10 +7838,6 @@
                     <a:cs typeface="Courier New" panose="02070309020205020404" pitchFamily="49" charset="0"/>
                   </a:rPr>
                   <a:t>PDOStatement::execute</a:t>
-                </a:r>
-                <a:r>
-                  <a:rPr lang="fr-BE"/>
-                  <a:t/>
                 </a:r>
                 <a:br>
                   <a:rPr lang="fr-BE"/>
@@ -8310,13 +8207,6 @@
       </p:transition>
     </mc:Fallback>
   </mc:AlternateContent>
-  <p:timing>
-    <p:tnLst>
-      <p:par>
-        <p:cTn id="1" dur="indefinite" restart="never" nodeType="tmRoot"/>
-      </p:par>
-    </p:tnLst>
-  </p:timing>
 </p:sld>
 </file>
 
@@ -8435,13 +8325,6 @@
       </p:transition>
     </mc:Fallback>
   </mc:AlternateContent>
-  <p:timing>
-    <p:tnLst>
-      <p:par>
-        <p:cTn id="1" dur="indefinite" restart="never" nodeType="tmRoot"/>
-      </p:par>
-    </p:tnLst>
-  </p:timing>
 </p:sld>
 </file>
 
@@ -8586,13 +8469,6 @@
       </p:transition>
     </mc:Fallback>
   </mc:AlternateContent>
-  <p:timing>
-    <p:tnLst>
-      <p:par>
-        <p:cTn id="1" dur="indefinite" restart="never" nodeType="tmRoot"/>
-      </p:par>
-    </p:tnLst>
-  </p:timing>
 </p:sld>
 </file>
 
@@ -9055,13 +8931,6 @@
       </p:transition>
     </mc:Fallback>
   </mc:AlternateContent>
-  <p:timing>
-    <p:tnLst>
-      <p:par>
-        <p:cTn id="1" dur="indefinite" restart="never" nodeType="tmRoot"/>
-      </p:par>
-    </p:tnLst>
-  </p:timing>
 </p:sld>
 </file>
 
@@ -9093,6 +8962,10 @@
           </p:nvPr>
         </p:nvSpPr>
         <p:spPr>
+          <a:xfrm>
+            <a:off x="839788" y="365125"/>
+            <a:ext cx="10515600" cy="1325563"/>
+          </a:xfrm>
           <a:noFill/>
           <a:ln>
             <a:noFill/>
@@ -9123,6 +8996,10 @@
           </p:nvPr>
         </p:nvSpPr>
         <p:spPr>
+          <a:xfrm>
+            <a:off x="839788" y="1681163"/>
+            <a:ext cx="3420000" cy="676143"/>
+          </a:xfrm>
           <a:noFill/>
           <a:ln>
             <a:noFill/>
@@ -9158,7 +9035,12 @@
             <p:ph type="body" idx="2"/>
           </p:nvPr>
         </p:nvSpPr>
-        <p:spPr/>
+        <p:spPr>
+          <a:xfrm>
+            <a:off x="839788" y="2353338"/>
+            <a:ext cx="3419999" cy="3836325"/>
+          </a:xfrm>
+        </p:spPr>
         <p:txBody>
           <a:bodyPr>
             <a:normAutofit/>
@@ -9224,7 +9106,12 @@
             <p:ph type="body" idx="3"/>
           </p:nvPr>
         </p:nvSpPr>
-        <p:spPr/>
+        <p:spPr>
+          <a:xfrm>
+            <a:off x="4394864" y="1677195"/>
+            <a:ext cx="3420000" cy="676143"/>
+          </a:xfrm>
+        </p:spPr>
         <p:txBody>
           <a:bodyPr anchor="t"/>
           <a:lstStyle/>
@@ -9255,8 +9142,8 @@
         </p:nvSpPr>
         <p:spPr>
           <a:xfrm>
-            <a:off x="4105275" y="2501107"/>
-            <a:ext cx="3709587" cy="3684588"/>
+            <a:off x="4394863" y="2357306"/>
+            <a:ext cx="3419999" cy="3828389"/>
           </a:xfrm>
         </p:spPr>
         <p:txBody>
@@ -9345,7 +9232,12 @@
             <p:ph type="body" idx="10"/>
           </p:nvPr>
         </p:nvSpPr>
-        <p:spPr/>
+        <p:spPr>
+          <a:xfrm>
+            <a:off x="7949940" y="1690688"/>
+            <a:ext cx="3420000" cy="662650"/>
+          </a:xfrm>
+        </p:spPr>
         <p:txBody>
           <a:bodyPr anchor="t"/>
           <a:lstStyle/>
@@ -9373,10 +9265,15 @@
             <p:ph type="body" idx="11"/>
           </p:nvPr>
         </p:nvSpPr>
-        <p:spPr/>
+        <p:spPr>
+          <a:xfrm>
+            <a:off x="7949937" y="2377806"/>
+            <a:ext cx="3433923" cy="3836325"/>
+          </a:xfrm>
+        </p:spPr>
         <p:txBody>
           <a:bodyPr>
-            <a:normAutofit/>
+            <a:normAutofit lnSpcReduction="10000"/>
           </a:bodyPr>
           <a:lstStyle/>
           <a:p>
@@ -9429,12 +9326,24 @@
             </a:r>
           </a:p>
           <a:p>
+            <a:pPr marL="114300" lvl="0" indent="0">
+              <a:buNone/>
+            </a:pPr>
+            <a:endParaRPr lang="fr-BE" sz="2400"/>
+          </a:p>
+          <a:p>
+            <a:pPr marL="114300" lvl="0" indent="0">
+              <a:buNone/>
+            </a:pPr>
+            <a:endParaRPr lang="fr-BE" sz="2400"/>
+          </a:p>
+          <a:p>
             <a:pPr marL="114300" indent="0">
               <a:buNone/>
             </a:pPr>
             <a:r>
               <a:rPr lang="fr-BE" sz="2400"/>
-              <a:t>27. Requête asynchrone</a:t>
+              <a:t>31. Requête asynchrone</a:t>
             </a:r>
           </a:p>
           <a:p>
@@ -9442,6 +9351,272 @@
               <a:buNone/>
             </a:pPr>
             <a:endParaRPr lang="fr-BE" sz="2400"/>
+          </a:p>
+        </p:txBody>
+      </p:sp>
+      <p:sp>
+        <p:nvSpPr>
+          <p:cNvPr id="5" name="Espace réservé du texte 9">
+            <a:extLst>
+              <a:ext uri="{FF2B5EF4-FFF2-40B4-BE49-F238E27FC236}">
+                <a16:creationId xmlns:a16="http://schemas.microsoft.com/office/drawing/2014/main" id="{F7F80AB2-1A54-F3C7-63AD-635689291298}"/>
+              </a:ext>
+            </a:extLst>
+          </p:cNvPr>
+          <p:cNvSpPr txBox="1">
+            <a:spLocks/>
+          </p:cNvSpPr>
+          <p:nvPr/>
+        </p:nvSpPr>
+        <p:spPr>
+          <a:xfrm>
+            <a:off x="7932738" y="5026572"/>
+            <a:ext cx="3751261" cy="823912"/>
+          </a:xfrm>
+          <a:prstGeom prst="rect">
+            <a:avLst/>
+          </a:prstGeom>
+          <a:noFill/>
+          <a:ln>
+            <a:noFill/>
+          </a:ln>
+        </p:spPr>
+        <p:txBody>
+          <a:bodyPr spcFirstLastPara="1" vert="horz" wrap="square" lIns="91425" tIns="45700" rIns="91425" bIns="45700" rtlCol="0" anchor="t" anchorCtr="0">
+            <a:normAutofit/>
+          </a:bodyPr>
+          <a:lstStyle>
+            <a:lvl1pPr marL="457200" lvl="0" indent="-228600" algn="l" defTabSz="914377" rtl="0" eaLnBrk="1" latinLnBrk="0" hangingPunct="1">
+              <a:lnSpc>
+                <a:spcPct val="90000"/>
+              </a:lnSpc>
+              <a:spcBef>
+                <a:spcPts val="1000"/>
+              </a:spcBef>
+              <a:spcAft>
+                <a:spcPts val="0"/>
+              </a:spcAft>
+              <a:buClr>
+                <a:schemeClr val="dk1"/>
+              </a:buClr>
+              <a:buSzPts val="2400"/>
+              <a:buFont typeface="Wingdings" panose="05000000000000000000" pitchFamily="2" charset="2"/>
+              <a:buNone/>
+              <a:defRPr sz="2400" b="1" kern="1200">
+                <a:solidFill>
+                  <a:schemeClr val="tx1"/>
+                </a:solidFill>
+                <a:latin typeface="+mn-lt"/>
+                <a:ea typeface="+mn-ea"/>
+                <a:cs typeface="+mn-cs"/>
+              </a:defRPr>
+            </a:lvl1pPr>
+            <a:lvl2pPr marL="914400" lvl="1" indent="-228600" algn="l" defTabSz="914377" rtl="0" eaLnBrk="1" latinLnBrk="0" hangingPunct="1">
+              <a:lnSpc>
+                <a:spcPct val="90000"/>
+              </a:lnSpc>
+              <a:spcBef>
+                <a:spcPts val="500"/>
+              </a:spcBef>
+              <a:spcAft>
+                <a:spcPts val="0"/>
+              </a:spcAft>
+              <a:buClr>
+                <a:schemeClr val="dk1"/>
+              </a:buClr>
+              <a:buSzPts val="2000"/>
+              <a:buFont typeface="Wingdings" panose="05000000000000000000" pitchFamily="2" charset="2"/>
+              <a:buNone/>
+              <a:defRPr sz="2000" b="1" kern="1200">
+                <a:solidFill>
+                  <a:schemeClr val="tx1"/>
+                </a:solidFill>
+                <a:latin typeface="+mn-lt"/>
+                <a:ea typeface="+mn-ea"/>
+                <a:cs typeface="+mn-cs"/>
+              </a:defRPr>
+            </a:lvl2pPr>
+            <a:lvl3pPr marL="1371600" lvl="2" indent="-228600" algn="l" defTabSz="914377" rtl="0" eaLnBrk="1" latinLnBrk="0" hangingPunct="1">
+              <a:lnSpc>
+                <a:spcPct val="90000"/>
+              </a:lnSpc>
+              <a:spcBef>
+                <a:spcPts val="500"/>
+              </a:spcBef>
+              <a:spcAft>
+                <a:spcPts val="0"/>
+              </a:spcAft>
+              <a:buClr>
+                <a:schemeClr val="dk1"/>
+              </a:buClr>
+              <a:buSzPts val="1800"/>
+              <a:buFont typeface="Wingdings" panose="05000000000000000000" pitchFamily="2" charset="2"/>
+              <a:buNone/>
+              <a:defRPr sz="1800" b="1" kern="1200">
+                <a:solidFill>
+                  <a:schemeClr val="tx1"/>
+                </a:solidFill>
+                <a:latin typeface="+mn-lt"/>
+                <a:ea typeface="+mn-ea"/>
+                <a:cs typeface="+mn-cs"/>
+              </a:defRPr>
+            </a:lvl3pPr>
+            <a:lvl4pPr marL="1828800" lvl="3" indent="-228600" algn="l" defTabSz="914377" rtl="0" eaLnBrk="1" latinLnBrk="0" hangingPunct="1">
+              <a:lnSpc>
+                <a:spcPct val="90000"/>
+              </a:lnSpc>
+              <a:spcBef>
+                <a:spcPts val="500"/>
+              </a:spcBef>
+              <a:spcAft>
+                <a:spcPts val="0"/>
+              </a:spcAft>
+              <a:buClr>
+                <a:schemeClr val="dk1"/>
+              </a:buClr>
+              <a:buSzPts val="1600"/>
+              <a:buFont typeface="Wingdings" panose="05000000000000000000" pitchFamily="2" charset="2"/>
+              <a:buNone/>
+              <a:defRPr sz="1600" b="1" kern="1200">
+                <a:solidFill>
+                  <a:schemeClr val="tx1"/>
+                </a:solidFill>
+                <a:latin typeface="+mn-lt"/>
+                <a:ea typeface="+mn-ea"/>
+                <a:cs typeface="+mn-cs"/>
+              </a:defRPr>
+            </a:lvl4pPr>
+            <a:lvl5pPr marL="2286000" lvl="4" indent="-228600" algn="l" defTabSz="914377" rtl="0" eaLnBrk="1" latinLnBrk="0" hangingPunct="1">
+              <a:lnSpc>
+                <a:spcPct val="90000"/>
+              </a:lnSpc>
+              <a:spcBef>
+                <a:spcPts val="500"/>
+              </a:spcBef>
+              <a:spcAft>
+                <a:spcPts val="0"/>
+              </a:spcAft>
+              <a:buClr>
+                <a:schemeClr val="dk1"/>
+              </a:buClr>
+              <a:buSzPts val="1600"/>
+              <a:buFont typeface="Wingdings" panose="05000000000000000000" pitchFamily="2" charset="2"/>
+              <a:buNone/>
+              <a:defRPr sz="1600" b="1" kern="1200">
+                <a:solidFill>
+                  <a:schemeClr val="tx1"/>
+                </a:solidFill>
+                <a:latin typeface="+mn-lt"/>
+                <a:ea typeface="+mn-ea"/>
+                <a:cs typeface="+mn-cs"/>
+              </a:defRPr>
+            </a:lvl5pPr>
+            <a:lvl6pPr marL="2743200" lvl="5" indent="-228600" algn="l" defTabSz="914377" rtl="0" eaLnBrk="1" latinLnBrk="0" hangingPunct="1">
+              <a:lnSpc>
+                <a:spcPct val="90000"/>
+              </a:lnSpc>
+              <a:spcBef>
+                <a:spcPts val="500"/>
+              </a:spcBef>
+              <a:spcAft>
+                <a:spcPts val="0"/>
+              </a:spcAft>
+              <a:buClr>
+                <a:schemeClr val="dk1"/>
+              </a:buClr>
+              <a:buSzPts val="1600"/>
+              <a:buFont typeface="Arial" panose="020B0604020202020204" pitchFamily="34" charset="0"/>
+              <a:buNone/>
+              <a:defRPr sz="1600" b="1" kern="1200">
+                <a:solidFill>
+                  <a:schemeClr val="tx1"/>
+                </a:solidFill>
+                <a:latin typeface="+mn-lt"/>
+                <a:ea typeface="+mn-ea"/>
+                <a:cs typeface="+mn-cs"/>
+              </a:defRPr>
+            </a:lvl6pPr>
+            <a:lvl7pPr marL="3200400" lvl="6" indent="-228600" algn="l" defTabSz="914377" rtl="0" eaLnBrk="1" latinLnBrk="0" hangingPunct="1">
+              <a:lnSpc>
+                <a:spcPct val="90000"/>
+              </a:lnSpc>
+              <a:spcBef>
+                <a:spcPts val="500"/>
+              </a:spcBef>
+              <a:spcAft>
+                <a:spcPts val="0"/>
+              </a:spcAft>
+              <a:buClr>
+                <a:schemeClr val="dk1"/>
+              </a:buClr>
+              <a:buSzPts val="1600"/>
+              <a:buFont typeface="Arial" panose="020B0604020202020204" pitchFamily="34" charset="0"/>
+              <a:buNone/>
+              <a:defRPr sz="1600" b="1" kern="1200">
+                <a:solidFill>
+                  <a:schemeClr val="tx1"/>
+                </a:solidFill>
+                <a:latin typeface="+mn-lt"/>
+                <a:ea typeface="+mn-ea"/>
+                <a:cs typeface="+mn-cs"/>
+              </a:defRPr>
+            </a:lvl7pPr>
+            <a:lvl8pPr marL="3657600" lvl="7" indent="-228600" algn="l" defTabSz="914377" rtl="0" eaLnBrk="1" latinLnBrk="0" hangingPunct="1">
+              <a:lnSpc>
+                <a:spcPct val="90000"/>
+              </a:lnSpc>
+              <a:spcBef>
+                <a:spcPts val="500"/>
+              </a:spcBef>
+              <a:spcAft>
+                <a:spcPts val="0"/>
+              </a:spcAft>
+              <a:buClr>
+                <a:schemeClr val="dk1"/>
+              </a:buClr>
+              <a:buSzPts val="1600"/>
+              <a:buFont typeface="Arial" panose="020B0604020202020204" pitchFamily="34" charset="0"/>
+              <a:buNone/>
+              <a:defRPr sz="1600" b="1" kern="1200">
+                <a:solidFill>
+                  <a:schemeClr val="tx1"/>
+                </a:solidFill>
+                <a:latin typeface="+mn-lt"/>
+                <a:ea typeface="+mn-ea"/>
+                <a:cs typeface="+mn-cs"/>
+              </a:defRPr>
+            </a:lvl8pPr>
+            <a:lvl9pPr marL="4114800" lvl="8" indent="-228600" algn="l" defTabSz="914377" rtl="0" eaLnBrk="1" latinLnBrk="0" hangingPunct="1">
+              <a:lnSpc>
+                <a:spcPct val="90000"/>
+              </a:lnSpc>
+              <a:spcBef>
+                <a:spcPts val="500"/>
+              </a:spcBef>
+              <a:spcAft>
+                <a:spcPts val="0"/>
+              </a:spcAft>
+              <a:buClr>
+                <a:schemeClr val="dk1"/>
+              </a:buClr>
+              <a:buSzPts val="1600"/>
+              <a:buFont typeface="Arial" panose="020B0604020202020204" pitchFamily="34" charset="0"/>
+              <a:buNone/>
+              <a:defRPr sz="1600" b="1" kern="1200">
+                <a:solidFill>
+                  <a:schemeClr val="tx1"/>
+                </a:solidFill>
+                <a:latin typeface="+mn-lt"/>
+                <a:ea typeface="+mn-ea"/>
+                <a:cs typeface="+mn-cs"/>
+              </a:defRPr>
+            </a:lvl9pPr>
+          </a:lstStyle>
+          <a:p>
+            <a:r>
+              <a:rPr lang="fr-BE"/>
+              <a:t>Single Page Application</a:t>
+            </a:r>
           </a:p>
         </p:txBody>
       </p:sp>
@@ -9462,13 +9637,6 @@
       </p:transition>
     </mc:Fallback>
   </mc:AlternateContent>
-  <p:timing>
-    <p:tnLst>
-      <p:par>
-        <p:cTn id="1" dur="indefinite" restart="never" nodeType="tmRoot"/>
-      </p:par>
-    </p:tnLst>
-  </p:timing>
 </p:sld>
 </file>
 
@@ -9815,13 +9983,6 @@
       </p:transition>
     </mc:Fallback>
   </mc:AlternateContent>
-  <p:timing>
-    <p:tnLst>
-      <p:par>
-        <p:cTn id="1" dur="indefinite" restart="never" nodeType="tmRoot"/>
-      </p:par>
-    </p:tnLst>
-  </p:timing>
 </p:sld>
 </file>
 
@@ -10184,13 +10345,6 @@
       </p:transition>
     </mc:Fallback>
   </mc:AlternateContent>
-  <p:timing>
-    <p:tnLst>
-      <p:par>
-        <p:cTn id="1" dur="indefinite" restart="never" nodeType="tmRoot"/>
-      </p:par>
-    </p:tnLst>
-  </p:timing>
 </p:sld>
 </file>
 
@@ -10540,13 +10694,6 @@
       </p:transition>
     </mc:Fallback>
   </mc:AlternateContent>
-  <p:timing>
-    <p:tnLst>
-      <p:par>
-        <p:cTn id="1" dur="indefinite" restart="never" nodeType="tmRoot"/>
-      </p:par>
-    </p:tnLst>
-  </p:timing>
 </p:sld>
 </file>
 
@@ -10731,13 +10878,6 @@
       </p:transition>
     </mc:Fallback>
   </mc:AlternateContent>
-  <p:timing>
-    <p:tnLst>
-      <p:par>
-        <p:cTn id="1" dur="indefinite" restart="never" nodeType="tmRoot"/>
-      </p:par>
-    </p:tnLst>
-  </p:timing>
 </p:sld>
 </file>
 
@@ -11063,13 +11203,6 @@
       </p:transition>
     </mc:Fallback>
   </mc:AlternateContent>
-  <p:timing>
-    <p:tnLst>
-      <p:par>
-        <p:cTn id="1" dur="indefinite" restart="never" nodeType="tmRoot"/>
-      </p:par>
-    </p:tnLst>
-  </p:timing>
 </p:sld>
 </file>
 
@@ -11395,10 +11528,6 @@
               </a:rPr>
               <a:t>row</a:t>
             </a:r>
-            <a:r>
-              <a:rPr lang="fr-BE" sz="2800"/>
-              <a:t/>
-            </a:r>
             <a:br>
               <a:rPr lang="fr-BE" sz="2800"/>
             </a:br>
@@ -11449,10 +11578,6 @@
                 <a:latin typeface="Consolas" panose="020B0609020204030204" pitchFamily="49" charset="0"/>
               </a:rPr>
               <a:t> </a:t>
-            </a:r>
-            <a:r>
-              <a:rPr lang="fr-BE" sz="2800"/>
-              <a:t/>
             </a:r>
             <a:br>
               <a:rPr lang="fr-BE" sz="2800"/>
@@ -11715,13 +11840,6 @@
       </p:transition>
     </mc:Fallback>
   </mc:AlternateContent>
-  <p:timing>
-    <p:tnLst>
-      <p:par>
-        <p:cTn id="1" dur="indefinite" restart="never" nodeType="tmRoot"/>
-      </p:par>
-    </p:tnLst>
-  </p:timing>
 </p:sld>
 </file>
 
@@ -11966,10 +12084,6 @@
               </a:rPr>
               <a:t> </a:t>
             </a:r>
-            <a:r>
-              <a:rPr lang="fr-BE" sz="3000"/>
-              <a:t/>
-            </a:r>
             <a:br>
               <a:rPr lang="fr-BE" sz="3000"/>
             </a:br>
@@ -12011,10 +12125,6 @@
                 <a:cs typeface="Courier New" panose="02070309020205020404" pitchFamily="49" charset="0"/>
               </a:rPr>
               <a:t>$data </a:t>
-            </a:r>
-            <a:r>
-              <a:rPr lang="fr-BE" sz="3000"/>
-              <a:t/>
             </a:r>
             <a:br>
               <a:rPr lang="fr-BE" sz="3000"/>
@@ -12438,13 +12548,6 @@
       </p:transition>
     </mc:Fallback>
   </mc:AlternateContent>
-  <p:timing>
-    <p:tnLst>
-      <p:par>
-        <p:cTn id="1" dur="indefinite" restart="never" nodeType="tmRoot"/>
-      </p:par>
-    </p:tnLst>
-  </p:timing>
 </p:sld>
 </file>
 
@@ -12558,13 +12661,6 @@
       </p:transition>
     </mc:Fallback>
   </mc:AlternateContent>
-  <p:timing>
-    <p:tnLst>
-      <p:par>
-        <p:cTn id="1" dur="indefinite" restart="never" nodeType="tmRoot"/>
-      </p:par>
-    </p:tnLst>
-  </p:timing>
 </p:sld>
 </file>
 
@@ -12893,13 +12989,6 @@
       </p:transition>
     </mc:Fallback>
   </mc:AlternateContent>
-  <p:timing>
-    <p:tnLst>
-      <p:par>
-        <p:cTn id="1" dur="indefinite" restart="never" nodeType="tmRoot"/>
-      </p:par>
-    </p:tnLst>
-  </p:timing>
 </p:sld>
 </file>
 
@@ -13064,13 +13153,6 @@
       </p:transition>
     </mc:Fallback>
   </mc:AlternateContent>
-  <p:timing>
-    <p:tnLst>
-      <p:par>
-        <p:cTn id="1" dur="indefinite" restart="never" nodeType="tmRoot"/>
-      </p:par>
-    </p:tnLst>
-  </p:timing>
 </p:sld>
 </file>
 
@@ -13249,13 +13331,6 @@
       </p:transition>
     </mc:Fallback>
   </mc:AlternateContent>
-  <p:timing>
-    <p:tnLst>
-      <p:par>
-        <p:cTn id="1" dur="indefinite" restart="never" nodeType="tmRoot"/>
-      </p:par>
-    </p:tnLst>
-  </p:timing>
 </p:sld>
 </file>
 
@@ -13645,13 +13720,6 @@
       </p:transition>
     </mc:Fallback>
   </mc:AlternateContent>
-  <p:timing>
-    <p:tnLst>
-      <p:par>
-        <p:cTn id="1" dur="indefinite" restart="never" nodeType="tmRoot"/>
-      </p:par>
-    </p:tnLst>
-  </p:timing>
 </p:sld>
 </file>
 
@@ -13993,55 +14061,7 @@
                 <a:latin typeface="Consolas" panose="020B0609020204030204" pitchFamily="49" charset="0"/>
                 <a:cs typeface="Courier New" panose="02070309020205020404" pitchFamily="49" charset="0"/>
               </a:rPr>
-              <a:t>[</a:t>
-            </a:r>
-            <a:r>
-              <a:rPr lang="en-US" sz="2600" dirty="0" smtClean="0">
-                <a:solidFill>
-                  <a:schemeClr val="accent6">
-                    <a:lumMod val="50000"/>
-                  </a:schemeClr>
-                </a:solidFill>
-                <a:latin typeface="Consolas" panose="020B0609020204030204" pitchFamily="49" charset="0"/>
-                <a:cs typeface="Courier New" panose="02070309020205020404" pitchFamily="49" charset="0"/>
-              </a:rPr>
-              <a:t>'mail</a:t>
-            </a:r>
-            <a:r>
-              <a:rPr lang="en-US" sz="2600" dirty="0">
-                <a:solidFill>
-                  <a:schemeClr val="accent6">
-                    <a:lumMod val="50000"/>
-                  </a:schemeClr>
-                </a:solidFill>
-                <a:latin typeface="Consolas" panose="020B0609020204030204" pitchFamily="49" charset="0"/>
-                <a:cs typeface="Courier New" panose="02070309020205020404" pitchFamily="49" charset="0"/>
-              </a:rPr>
-              <a:t>' =&gt; $email, </a:t>
-            </a:r>
-            <a:r>
-              <a:rPr lang="en-US" sz="2600" dirty="0" smtClean="0">
-                <a:solidFill>
-                  <a:schemeClr val="accent6">
-                    <a:lumMod val="50000"/>
-                  </a:schemeClr>
-                </a:solidFill>
-                <a:latin typeface="Consolas" panose="020B0609020204030204" pitchFamily="49" charset="0"/>
-                <a:cs typeface="Courier New" panose="02070309020205020404" pitchFamily="49" charset="0"/>
-              </a:rPr>
-              <a:t>'stat' </a:t>
-            </a:r>
-            <a:r>
-              <a:rPr lang="en-US" sz="2600" dirty="0">
-                <a:solidFill>
-                  <a:schemeClr val="accent6">
-                    <a:lumMod val="50000"/>
-                  </a:schemeClr>
-                </a:solidFill>
-                <a:latin typeface="Consolas" panose="020B0609020204030204" pitchFamily="49" charset="0"/>
-                <a:cs typeface="Courier New" panose="02070309020205020404" pitchFamily="49" charset="0"/>
-              </a:rPr>
-              <a:t>=&gt; $status];</a:t>
+              <a:t>['mail' =&gt; $email, 'stat' =&gt; $status];</a:t>
             </a:r>
             <a:endParaRPr lang="fr-BE" sz="2600" dirty="0">
               <a:solidFill>
@@ -14271,13 +14291,6 @@
       </p:transition>
     </mc:Fallback>
   </mc:AlternateContent>
-  <p:timing>
-    <p:tnLst>
-      <p:par>
-        <p:cTn id="1" dur="indefinite" restart="never" nodeType="tmRoot"/>
-      </p:par>
-    </p:tnLst>
-  </p:timing>
 </p:sld>
 </file>
 
@@ -14573,13 +14586,6 @@
       </p:transition>
     </mc:Fallback>
   </mc:AlternateContent>
-  <p:timing>
-    <p:tnLst>
-      <p:par>
-        <p:cTn id="1" dur="indefinite" restart="never" nodeType="tmRoot"/>
-      </p:par>
-    </p:tnLst>
-  </p:timing>
 </p:sld>
 </file>
 
@@ -14861,13 +14867,6 @@
       </p:transition>
     </mc:Fallback>
   </mc:AlternateContent>
-  <p:timing>
-    <p:tnLst>
-      <p:par>
-        <p:cTn id="1" dur="indefinite" restart="never" nodeType="tmRoot"/>
-      </p:par>
-    </p:tnLst>
-  </p:timing>
 </p:sld>
 </file>
 
@@ -15060,13 +15059,6 @@
       </p:transition>
     </mc:Fallback>
   </mc:AlternateContent>
-  <p:timing>
-    <p:tnLst>
-      <p:par>
-        <p:cTn id="1" dur="indefinite" restart="never" nodeType="tmRoot"/>
-      </p:par>
-    </p:tnLst>
-  </p:timing>
 </p:sld>
 </file>
 
@@ -15611,13 +15603,6 @@
       </p:transition>
     </mc:Fallback>
   </mc:AlternateContent>
-  <p:timing>
-    <p:tnLst>
-      <p:par>
-        <p:cTn id="1" dur="indefinite" restart="never" nodeType="tmRoot"/>
-      </p:par>
-    </p:tnLst>
-  </p:timing>
 </p:sld>
 </file>
 
@@ -16100,13 +16085,6 @@
       </p:transition>
     </mc:Fallback>
   </mc:AlternateContent>
-  <p:timing>
-    <p:tnLst>
-      <p:par>
-        <p:cTn id="1" dur="indefinite" restart="never" nodeType="tmRoot"/>
-      </p:par>
-    </p:tnLst>
-  </p:timing>
 </p:sld>
 </file>
 
@@ -16594,13 +16572,6 @@
       </p:transition>
     </mc:Fallback>
   </mc:AlternateContent>
-  <p:timing>
-    <p:tnLst>
-      <p:par>
-        <p:cTn id="1" dur="indefinite" restart="never" nodeType="tmRoot"/>
-      </p:par>
-    </p:tnLst>
-  </p:timing>
 </p:sld>
 </file>
 
@@ -16871,13 +16842,6 @@
       </p:transition>
     </mc:Fallback>
   </mc:AlternateContent>
-  <p:timing>
-    <p:tnLst>
-      <p:par>
-        <p:cTn id="1" dur="indefinite" restart="never" nodeType="tmRoot"/>
-      </p:par>
-    </p:tnLst>
-  </p:timing>
 </p:sld>
 </file>
 
@@ -17099,13 +17063,6 @@
       </p:transition>
     </mc:Fallback>
   </mc:AlternateContent>
-  <p:timing>
-    <p:tnLst>
-      <p:par>
-        <p:cTn id="1" dur="indefinite" restart="never" nodeType="tmRoot"/>
-      </p:par>
-    </p:tnLst>
-  </p:timing>
 </p:sld>
 </file>
 
@@ -17232,13 +17189,6 @@
       </p:transition>
     </mc:Fallback>
   </mc:AlternateContent>
-  <p:timing>
-    <p:tnLst>
-      <p:par>
-        <p:cTn id="1" dur="indefinite" restart="never" nodeType="tmRoot"/>
-      </p:par>
-    </p:tnLst>
-  </p:timing>
 </p:sld>
 </file>
 
@@ -17471,13 +17421,6 @@
       </p:transition>
     </mc:Fallback>
   </mc:AlternateContent>
-  <p:timing>
-    <p:tnLst>
-      <p:par>
-        <p:cTn id="1" dur="indefinite" restart="never" nodeType="tmRoot"/>
-      </p:par>
-    </p:tnLst>
-  </p:timing>
 </p:sld>
 </file>
 
@@ -17687,13 +17630,6 @@
       </p:transition>
     </mc:Fallback>
   </mc:AlternateContent>
-  <p:timing>
-    <p:tnLst>
-      <p:par>
-        <p:cTn id="1" dur="indefinite" restart="never" nodeType="tmRoot"/>
-      </p:par>
-    </p:tnLst>
-  </p:timing>
 </p:sld>
 </file>
 
@@ -17823,13 +17759,6 @@
       </p:transition>
     </mc:Fallback>
   </mc:AlternateContent>
-  <p:timing>
-    <p:tnLst>
-      <p:par>
-        <p:cTn id="1" dur="indefinite" restart="never" nodeType="tmRoot"/>
-      </p:par>
-    </p:tnLst>
-  </p:timing>
 </p:sld>
 </file>
 
@@ -18149,13 +18078,6 @@
       </p:transition>
     </mc:Fallback>
   </mc:AlternateContent>
-  <p:timing>
-    <p:tnLst>
-      <p:par>
-        <p:cTn id="1" dur="indefinite" restart="never" nodeType="tmRoot"/>
-      </p:par>
-    </p:tnLst>
-  </p:timing>
 </p:sld>
 </file>
 
@@ -18297,13 +18219,6 @@
       </p:transition>
     </mc:Fallback>
   </mc:AlternateContent>
-  <p:timing>
-    <p:tnLst>
-      <p:par>
-        <p:cTn id="1" dur="indefinite" restart="never" nodeType="tmRoot"/>
-      </p:par>
-    </p:tnLst>
-  </p:timing>
 </p:sld>
 </file>
 
@@ -18492,13 +18407,6 @@
       </p:transition>
     </mc:Fallback>
   </mc:AlternateContent>
-  <p:timing>
-    <p:tnLst>
-      <p:par>
-        <p:cTn id="1" dur="indefinite" restart="never" nodeType="tmRoot"/>
-      </p:par>
-    </p:tnLst>
-  </p:timing>
 </p:sld>
 </file>
 
@@ -18721,13 +18629,6 @@
       </p:transition>
     </mc:Fallback>
   </mc:AlternateContent>
-  <p:timing>
-    <p:tnLst>
-      <p:par>
-        <p:cTn id="1" dur="indefinite" restart="never" nodeType="tmRoot"/>
-      </p:par>
-    </p:tnLst>
-  </p:timing>
 </p:sld>
 </file>
 
@@ -19147,13 +19048,6 @@
       </p:transition>
     </mc:Fallback>
   </mc:AlternateContent>
-  <p:timing>
-    <p:tnLst>
-      <p:par>
-        <p:cTn id="1" dur="indefinite" restart="never" nodeType="tmRoot"/>
-      </p:par>
-    </p:tnLst>
-  </p:timing>
 </p:sld>
 </file>
 
@@ -19488,13 +19382,6 @@
       </p:transition>
     </mc:Fallback>
   </mc:AlternateContent>
-  <p:timing>
-    <p:tnLst>
-      <p:par>
-        <p:cTn id="1" dur="indefinite" restart="never" nodeType="tmRoot"/>
-      </p:par>
-    </p:tnLst>
-  </p:timing>
 </p:sld>
 </file>
 
@@ -19872,13 +19759,6 @@
       </p:transition>
     </mc:Fallback>
   </mc:AlternateContent>
-  <p:timing>
-    <p:tnLst>
-      <p:par>
-        <p:cTn id="1" dur="indefinite" restart="never" nodeType="tmRoot"/>
-      </p:par>
-    </p:tnLst>
-  </p:timing>
 </p:sld>
 </file>
 
@@ -20061,13 +19941,6 @@
       </p:transition>
     </mc:Fallback>
   </mc:AlternateContent>
-  <p:timing>
-    <p:tnLst>
-      <p:par>
-        <p:cTn id="1" dur="indefinite" restart="never" nodeType="tmRoot"/>
-      </p:par>
-    </p:tnLst>
-  </p:timing>
 </p:sld>
 </file>
 
@@ -20539,13 +20412,6 @@
       </p:transition>
     </mc:Fallback>
   </mc:AlternateContent>
-  <p:timing>
-    <p:tnLst>
-      <p:par>
-        <p:cTn id="1" dur="indefinite" restart="never" nodeType="tmRoot"/>
-      </p:par>
-    </p:tnLst>
-  </p:timing>
 </p:sld>
 </file>
 
@@ -20727,13 +20593,6 @@
       </p:transition>
     </mc:Fallback>
   </mc:AlternateContent>
-  <p:timing>
-    <p:tnLst>
-      <p:par>
-        <p:cTn id="1" dur="indefinite" restart="never" nodeType="tmRoot"/>
-      </p:par>
-    </p:tnLst>
-  </p:timing>
 </p:sld>
 </file>
 
@@ -20967,13 +20826,6 @@
       </p:transition>
     </mc:Fallback>
   </mc:AlternateContent>
-  <p:timing>
-    <p:tnLst>
-      <p:par>
-        <p:cTn id="1" dur="indefinite" restart="never" nodeType="tmRoot"/>
-      </p:par>
-    </p:tnLst>
-  </p:timing>
 </p:sld>
 </file>
 
@@ -21415,13 +21267,6 @@
       </p:transition>
     </mc:Fallback>
   </mc:AlternateContent>
-  <p:timing>
-    <p:tnLst>
-      <p:par>
-        <p:cTn id="1" dur="indefinite" restart="never" nodeType="tmRoot"/>
-      </p:par>
-    </p:tnLst>
-  </p:timing>
 </p:sld>
 </file>
 
@@ -21771,13 +21616,6 @@
       </p:transition>
     </mc:Fallback>
   </mc:AlternateContent>
-  <p:timing>
-    <p:tnLst>
-      <p:par>
-        <p:cTn id="1" dur="indefinite" restart="never" nodeType="tmRoot"/>
-      </p:par>
-    </p:tnLst>
-  </p:timing>
 </p:sld>
 </file>
 
@@ -22059,13 +21897,6 @@
       </p:transition>
     </mc:Fallback>
   </mc:AlternateContent>
-  <p:timing>
-    <p:tnLst>
-      <p:par>
-        <p:cTn id="1" dur="indefinite" restart="never" nodeType="tmRoot"/>
-      </p:par>
-    </p:tnLst>
-  </p:timing>
 </p:sld>
 </file>
 
@@ -22262,18 +22093,6 @@
               <a:t>fetchAll</a:t>
             </a:r>
             <a:r>
-              <a:rPr lang="en-US" sz="2600" dirty="0" smtClean="0">
-                <a:solidFill>
-                  <a:schemeClr val="accent6">
-                    <a:lumMod val="50000"/>
-                  </a:schemeClr>
-                </a:solidFill>
-                <a:latin typeface="Consolas" panose="020B0609020204030204" pitchFamily="49" charset="0"/>
-                <a:cs typeface="Courier New" panose="02070309020205020404" pitchFamily="49" charset="0"/>
-              </a:rPr>
-              <a:t>(POO::FETCH_ASSOC</a:t>
-            </a:r>
-            <a:r>
               <a:rPr lang="en-US" sz="2600" dirty="0">
                 <a:solidFill>
                   <a:schemeClr val="accent6">
@@ -22283,7 +22102,7 @@
                 <a:latin typeface="Consolas" panose="020B0609020204030204" pitchFamily="49" charset="0"/>
                 <a:cs typeface="Courier New" panose="02070309020205020404" pitchFamily="49" charset="0"/>
               </a:rPr>
-              <a:t>);</a:t>
+              <a:t>(POO::FETCH_ASSOC);</a:t>
             </a:r>
             <a:endParaRPr lang="fr-BE" sz="2600" dirty="0">
               <a:latin typeface="Consolas" panose="020B0609020204030204" pitchFamily="49" charset="0"/>
@@ -22504,10 +22323,9 @@
               <a:buNone/>
             </a:pPr>
             <a:r>
-              <a:rPr lang="fr-BE" dirty="0" smtClean="0"/>
+              <a:rPr lang="fr-BE" dirty="0"/>
               <a:t>-</a:t>
             </a:r>
-            <a:endParaRPr lang="fr-BE" dirty="0"/>
           </a:p>
         </p:txBody>
       </p:sp>
@@ -22533,13 +22351,6 @@
       </p:transition>
     </mc:Fallback>
   </mc:AlternateContent>
-  <p:timing>
-    <p:tnLst>
-      <p:par>
-        <p:cTn id="1" dur="indefinite" restart="never" nodeType="tmRoot"/>
-      </p:par>
-    </p:tnLst>
-  </p:timing>
 </p:sld>
 </file>
 
@@ -22671,13 +22482,6 @@
       </p:transition>
     </mc:Fallback>
   </mc:AlternateContent>
-  <p:timing>
-    <p:tnLst>
-      <p:par>
-        <p:cTn id="1" dur="indefinite" restart="never" nodeType="tmRoot"/>
-      </p:par>
-    </p:tnLst>
-  </p:timing>
 </p:sld>
 </file>
 
@@ -22925,13 +22729,6 @@
       </p:transition>
     </mc:Fallback>
   </mc:AlternateContent>
-  <p:timing>
-    <p:tnLst>
-      <p:par>
-        <p:cTn id="1" dur="indefinite" restart="never" nodeType="tmRoot"/>
-      </p:par>
-    </p:tnLst>
-  </p:timing>
 </p:sld>
 </file>
 
@@ -23068,13 +22865,6 @@
       </p:transition>
     </mc:Fallback>
   </mc:AlternateContent>
-  <p:timing>
-    <p:tnLst>
-      <p:par>
-        <p:cTn id="1" dur="indefinite" restart="never" nodeType="tmRoot"/>
-      </p:par>
-    </p:tnLst>
-  </p:timing>
 </p:sld>
 </file>
 
@@ -23262,7 +23052,7 @@
           <a:p>
             <a:fld id="{5D1E7CC7-66BF-4B04-8372-9E986CBE7657}" type="datetime1">
               <a:rPr lang="fr-BE" smtClean="0"/>
-              <a:t>19-01-26</a:t>
+              <a:t>07-09-26</a:t>
             </a:fld>
             <a:endParaRPr lang="fr-BE"/>
           </a:p>
@@ -23319,13 +23109,6 @@
       </p:transition>
     </mc:Fallback>
   </mc:AlternateContent>
-  <p:timing>
-    <p:tnLst>
-      <p:par>
-        <p:cTn id="1" dur="indefinite" restart="never" nodeType="tmRoot"/>
-      </p:par>
-    </p:tnLst>
-  </p:timing>
 </p:sld>
 </file>
 
@@ -23941,13 +23724,6 @@
       </p:transition>
     </mc:Fallback>
   </mc:AlternateContent>
-  <p:timing>
-    <p:tnLst>
-      <p:par>
-        <p:cTn id="1" dur="indefinite" restart="never" nodeType="tmRoot"/>
-      </p:par>
-    </p:tnLst>
-  </p:timing>
 </p:sld>
 </file>
 
@@ -24133,13 +23909,6 @@
       </p:transition>
     </mc:Fallback>
   </mc:AlternateContent>
-  <p:timing>
-    <p:tnLst>
-      <p:par>
-        <p:cTn id="1" dur="indefinite" restart="never" nodeType="tmRoot"/>
-      </p:par>
-    </p:tnLst>
-  </p:timing>
 </p:sld>
 </file>
 
@@ -24327,14 +24096,6 @@
                 </a:rPr>
                 <a:t>t_deal</a:t>
               </a:r>
-              <a:r>
-                <a:rPr lang="fr-BE">
-                  <a:solidFill>
-                    <a:schemeClr val="tx1"/>
-                  </a:solidFill>
-                </a:rPr>
-                <a:t/>
-              </a:r>
               <a:br>
                 <a:rPr lang="fr-BE">
                   <a:solidFill>
@@ -24350,14 +24111,6 @@
                 </a:rPr>
                 <a:t>id_dea</a:t>
               </a:r>
-              <a:r>
-                <a:rPr lang="fr-BE">
-                  <a:solidFill>
-                    <a:schemeClr val="tx1"/>
-                  </a:solidFill>
-                </a:rPr>
-                <a:t/>
-              </a:r>
               <a:br>
                 <a:rPr lang="fr-BE">
                   <a:solidFill>
@@ -24372,14 +24125,6 @@
                   </a:solidFill>
                 </a:rPr>
                 <a:t>name_dea</a:t>
-              </a:r>
-              <a:r>
-                <a:rPr lang="fr-BE">
-                  <a:solidFill>
-                    <a:schemeClr val="tx1"/>
-                  </a:solidFill>
-                </a:rPr>
-                <a:t/>
               </a:r>
               <a:br>
                 <a:rPr lang="fr-BE">
@@ -24535,14 +24280,6 @@
                 </a:rPr>
                 <a:t>t_player</a:t>
               </a:r>
-              <a:r>
-                <a:rPr lang="fr-BE">
-                  <a:solidFill>
-                    <a:schemeClr val="tx1"/>
-                  </a:solidFill>
-                </a:rPr>
-                <a:t/>
-              </a:r>
               <a:br>
                 <a:rPr lang="fr-BE">
                   <a:solidFill>
@@ -24558,14 +24295,6 @@
                 </a:rPr>
                 <a:t>id_pla</a:t>
               </a:r>
-              <a:r>
-                <a:rPr lang="fr-BE">
-                  <a:solidFill>
-                    <a:schemeClr val="tx1"/>
-                  </a:solidFill>
-                </a:rPr>
-                <a:t/>
-              </a:r>
               <a:br>
                 <a:rPr lang="fr-BE">
                   <a:solidFill>
@@ -24580,14 +24309,6 @@
                   </a:solidFill>
                 </a:rPr>
                 <a:t>name_pla</a:t>
-              </a:r>
-              <a:r>
-                <a:rPr lang="fr-BE">
-                  <a:solidFill>
-                    <a:schemeClr val="tx1"/>
-                  </a:solidFill>
-                </a:rPr>
-                <a:t/>
               </a:r>
               <a:br>
                 <a:rPr lang="fr-BE">
@@ -24751,14 +24472,6 @@
                 </a:rPr>
                 <a:t>t_team</a:t>
               </a:r>
-              <a:r>
-                <a:rPr lang="fr-BE">
-                  <a:solidFill>
-                    <a:schemeClr val="tx1"/>
-                  </a:solidFill>
-                </a:rPr>
-                <a:t/>
-              </a:r>
               <a:br>
                 <a:rPr lang="fr-BE">
                   <a:solidFill>
@@ -24773,14 +24486,6 @@
                   </a:solidFill>
                 </a:rPr>
                 <a:t>id_tea</a:t>
-              </a:r>
-              <a:r>
-                <a:rPr lang="fr-BE">
-                  <a:solidFill>
-                    <a:schemeClr val="tx1"/>
-                  </a:solidFill>
-                </a:rPr>
-                <a:t/>
               </a:r>
               <a:br>
                 <a:rPr lang="fr-BE">
@@ -24936,14 +24641,6 @@
                 </a:rPr>
                 <a:t>t_score</a:t>
               </a:r>
-              <a:r>
-                <a:rPr lang="fr-BE">
-                  <a:solidFill>
-                    <a:schemeClr val="tx1"/>
-                  </a:solidFill>
-                </a:rPr>
-                <a:t/>
-              </a:r>
               <a:br>
                 <a:rPr lang="fr-BE">
                   <a:solidFill>
@@ -24958,14 +24655,6 @@
                   </a:solidFill>
                 </a:rPr>
                 <a:t>id_sco</a:t>
-              </a:r>
-              <a:r>
-                <a:rPr lang="fr-BE">
-                  <a:solidFill>
-                    <a:schemeClr val="tx1"/>
-                  </a:solidFill>
-                </a:rPr>
-                <a:t/>
               </a:r>
               <a:br>
                 <a:rPr lang="fr-BE">
@@ -24982,14 +24671,6 @@
                 </a:rPr>
                 <a:t>score_sco</a:t>
               </a:r>
-              <a:r>
-                <a:rPr lang="fr-BE">
-                  <a:solidFill>
-                    <a:schemeClr val="tx1"/>
-                  </a:solidFill>
-                </a:rPr>
-                <a:t/>
-              </a:r>
               <a:br>
                 <a:rPr lang="fr-BE">
                   <a:solidFill>
@@ -25005,14 +24686,6 @@
                 </a:rPr>
                 <a:t>date_sco</a:t>
               </a:r>
-              <a:r>
-                <a:rPr lang="fr-BE">
-                  <a:solidFill>
-                    <a:schemeClr val="tx1"/>
-                  </a:solidFill>
-                </a:rPr>
-                <a:t/>
-              </a:r>
               <a:br>
                 <a:rPr lang="fr-BE">
                   <a:solidFill>
@@ -25027,14 +24700,6 @@
                   </a:solidFill>
                 </a:rPr>
                 <a:t>fk_player_id_sco</a:t>
-              </a:r>
-              <a:r>
-                <a:rPr lang="fr-BE">
-                  <a:solidFill>
-                    <a:schemeClr val="tx1"/>
-                  </a:solidFill>
-                </a:rPr>
-                <a:t/>
               </a:r>
               <a:br>
                 <a:rPr lang="fr-BE">
@@ -25465,13 +25130,6 @@
       </p:transition>
     </mc:Fallback>
   </mc:AlternateContent>
-  <p:timing>
-    <p:tnLst>
-      <p:par>
-        <p:cTn id="1" dur="indefinite" restart="never" nodeType="tmRoot"/>
-      </p:par>
-    </p:tnLst>
-  </p:timing>
 </p:sld>
 </file>
 
@@ -25780,13 +25438,6 @@
       </p:transition>
     </mc:Fallback>
   </mc:AlternateContent>
-  <p:timing>
-    <p:tnLst>
-      <p:par>
-        <p:cTn id="1" dur="indefinite" restart="never" nodeType="tmRoot"/>
-      </p:par>
-    </p:tnLst>
-  </p:timing>
 </p:sld>
 </file>
 
